--- a/curso_es/pptx/S73.pptx
+++ b/curso_es/pptx/S73.pptx
@@ -3903,7 +3903,7 @@
                 </a:solidFill>
                 <a:latin typeface="Nunito Sans"/>
               </a:rPr>
-              <a:t>Volvemos a Aitor: de Santutxu, del Athletic, euskaldun, hermano mayor, jugador de Play, nieto de una abuela gallega. (Ejemplo inventado.)</a:t>
+              <a:t>Volvemos al chico de antes: de Santutxu, del Athletic, euskaldun, hermano mayor, jugador de Play, nieto de una abuela gallega. (Ejemplo inventado.)</a:t>
             </a:r>
           </a:p>
         </p:txBody>
@@ -4001,7 +4001,7 @@
                 </a:solidFill>
                 <a:latin typeface="Nunito Sans"/>
               </a:rPr>
-              <a:t>No compiten: Aitor puede sentirse de Bilbao y querer también a Galicia.</a:t>
+              <a:t>No compiten: ese chico puede sentirse de Bilbao y querer también a Galicia.</a:t>
             </a:r>
           </a:p>
           <a:p>
@@ -4212,7 +4212,7 @@
                 </a:solidFill>
                 <a:latin typeface="Nunito Sans"/>
               </a:rPr>
-              <a:t>Tras un derbi, en el grupo de WhatsApp de clase alguien escribe sobre Chen: «Es de la Real. No os fieis de él para nada».</a:t>
+              <a:t>Tras un derbi, en el grupo del equipo alguien escribe sobre un compañero: «Es de la Real. No os fieis de él para nada».</a:t>
             </a:r>
           </a:p>
         </p:txBody>
@@ -4260,7 +4260,7 @@
                 </a:solidFill>
                 <a:latin typeface="Nunito Sans"/>
               </a:rPr>
-              <a:t>Se reduce a Chen a </a:t>
+              <a:t>Se reduce a ese compañero a </a:t>
             </a:r>
             <a:r>
               <a:rPr sz="2400" b="1">
@@ -4328,7 +4328,7 @@
                 </a:solidFill>
                 <a:latin typeface="Nunito Sans"/>
               </a:rPr>
-              <a:t>¿Viene a cuento? Ser de la Real no dice nada de si Chen es de fiar.</a:t>
+              <a:t>¿Viene a cuento? Ser de la Real no dice nada de si es de fiar.</a:t>
             </a:r>
           </a:p>
           <a:p>
@@ -4539,7 +4539,7 @@
                 </a:solidFill>
                 <a:latin typeface="Nunito Sans"/>
               </a:rPr>
-              <a:t>Después de la sesión 66, Maialen piensa: «Si los grupos crean el “nosotros y ellos”, lo mejor es no sentirse parte de ninguno».</a:t>
+              <a:t>Después de la sesión 66, una chica piensa: «Si los grupos crean el “nosotros y ellos”, lo mejor es no sentirse parte de ninguno».</a:t>
             </a:r>
           </a:p>
         </p:txBody>
@@ -6265,7 +6265,7 @@
                 </a:solidFill>
                 <a:latin typeface="Nunito Sans"/>
               </a:rPr>
-              <a:t>Aitor es de Santutxu, del Athletic, habla euskera, es hermano mayor, juega a la Play y su abuela es gallega.</a:t>
+              <a:t>Un chico es de Santutxu, del Athletic, habla euskera, es hermano mayor, juega a la Play y su abuela es gallega.</a:t>
             </a:r>
           </a:p>
         </p:txBody>
@@ -6304,7 +6304,7 @@
                 </a:solidFill>
                 <a:latin typeface="Nunito Sans"/>
               </a:rPr>
-              <a:t>¿Cuál de esas cosas es «el verdadero Aitor»?</a:t>
+              <a:t>¿Cuál de esas cosas es quien es de verdad?</a:t>
             </a:r>
           </a:p>
         </p:txBody>
